--- a/output/doc/user-flow-decks/03-internal-campaign-operations-from-the-manage-data-panel.pptx
+++ b/output/doc/user-flow-decks/03-internal-campaign-operations-from-the-manage-data-panel.pptx
@@ -3363,7 +3363,7 @@
                 </a:solidFill>
                 <a:latin typeface="Aptos"/>
               </a:rPr>
-              <a:t>Generated: 2026-04-11</a:t>
+              <a:t>Generated: 2026-04-23</a:t>
             </a:r>
           </a:p>
         </p:txBody>
@@ -4411,7 +4411,7 @@
         <p:spPr>
           <a:xfrm>
             <a:off x="749808" y="1097280"/>
-            <a:ext cx="4023360" cy="256032"/>
+            <a:ext cx="3931920" cy="4754880"/>
           </a:xfrm>
           <a:prstGeom prst="rect">
             <a:avLst/>
@@ -4419,12 +4419,19 @@
           <a:noFill/>
         </p:spPr>
         <p:txBody>
-          <a:bodyPr wrap="square" anchor="t">
+          <a:bodyPr wrap="square" lIns="0" rIns="0" tIns="0" bIns="0">
             <a:spAutoFit/>
           </a:bodyPr>
           <a:lstStyle/>
           <a:p>
-            <a:pPr algn="l"/>
+            <a:pPr algn="l">
+              <a:spcBef>
+                <a:spcPts val="0"/>
+              </a:spcBef>
+              <a:spcAft>
+                <a:spcPts val="200"/>
+              </a:spcAft>
+            </a:pPr>
             <a:r>
               <a:rPr sz="1200" b="1">
                 <a:solidFill>
@@ -4435,33 +4442,20 @@
               <a:t>User action</a:t>
             </a:r>
           </a:p>
-        </p:txBody>
-      </p:sp>
-      <p:sp>
-        <p:nvSpPr>
-          <p:cNvPr id="8" name="TextBox 7"/>
-          <p:cNvSpPr txBox="1"/>
-          <p:nvPr/>
-        </p:nvSpPr>
-        <p:spPr>
-          <a:xfrm>
-            <a:off x="749808" y="1353312"/>
-            <a:ext cx="3931920" cy="621792"/>
-          </a:xfrm>
-          <a:prstGeom prst="rect">
-            <a:avLst/>
-          </a:prstGeom>
-          <a:noFill/>
-        </p:spPr>
-        <p:txBody>
-          <a:bodyPr wrap="square" anchor="t">
-            <a:spAutoFit/>
-          </a:bodyPr>
-          <a:lstStyle/>
-          <a:p>
-            <a:pPr algn="l"/>
-            <a:r>
-              <a:rPr sz="1600" b="0">
+          <a:p>
+            <a:pPr algn="l">
+              <a:lnSpc>
+                <a:spcPct val="110000"/>
+              </a:lnSpc>
+              <a:spcBef>
+                <a:spcPts val="0"/>
+              </a:spcBef>
+              <a:spcAft>
+                <a:spcPts val="800"/>
+              </a:spcAft>
+            </a:pPr>
+            <a:r>
+              <a:rPr sz="1300">
                 <a:solidFill>
                   <a:srgbClr val="102A43"/>
                 </a:solidFill>
@@ -4470,31 +4464,15 @@
               <a:t>Sign in to the portal and navigate to the Manage Data Panel.</a:t>
             </a:r>
           </a:p>
-        </p:txBody>
-      </p:sp>
-      <p:sp>
-        <p:nvSpPr>
-          <p:cNvPr id="9" name="TextBox 8"/>
-          <p:cNvSpPr txBox="1"/>
-          <p:nvPr/>
-        </p:nvSpPr>
-        <p:spPr>
-          <a:xfrm>
-            <a:off x="749808" y="2011680"/>
-            <a:ext cx="4023360" cy="256032"/>
-          </a:xfrm>
-          <a:prstGeom prst="rect">
-            <a:avLst/>
-          </a:prstGeom>
-          <a:noFill/>
-        </p:spPr>
-        <p:txBody>
-          <a:bodyPr wrap="square" anchor="t">
-            <a:spAutoFit/>
-          </a:bodyPr>
-          <a:lstStyle/>
-          <a:p>
-            <a:pPr algn="l"/>
+          <a:p>
+            <a:pPr algn="l">
+              <a:spcBef>
+                <a:spcPts val="0"/>
+              </a:spcBef>
+              <a:spcAft>
+                <a:spcPts val="200"/>
+              </a:spcAft>
+            </a:pPr>
             <a:r>
               <a:rPr sz="1200" b="1">
                 <a:solidFill>
@@ -4505,66 +4483,37 @@
               <a:t>What appears on screen</a:t>
             </a:r>
           </a:p>
-        </p:txBody>
-      </p:sp>
-      <p:sp>
-        <p:nvSpPr>
-          <p:cNvPr id="10" name="TextBox 9"/>
-          <p:cNvSpPr txBox="1"/>
-          <p:nvPr/>
-        </p:nvSpPr>
-        <p:spPr>
-          <a:xfrm>
-            <a:off x="749808" y="2267712"/>
-            <a:ext cx="3931920" cy="713232"/>
-          </a:xfrm>
-          <a:prstGeom prst="rect">
-            <a:avLst/>
-          </a:prstGeom>
-          <a:noFill/>
-        </p:spPr>
-        <p:txBody>
-          <a:bodyPr wrap="square" anchor="t">
-            <a:spAutoFit/>
-          </a:bodyPr>
-          <a:lstStyle/>
-          <a:p>
-            <a:pPr algn="l"/>
-            <a:r>
-              <a:rPr sz="1600" b="0">
+          <a:p>
+            <a:pPr algn="l">
+              <a:lnSpc>
+                <a:spcPct val="110000"/>
+              </a:lnSpc>
+              <a:spcBef>
+                <a:spcPts val="0"/>
+              </a:spcBef>
+              <a:spcAft>
+                <a:spcPts val="800"/>
+              </a:spcAft>
+            </a:pPr>
+            <a:r>
+              <a:rPr sz="1300">
                 <a:solidFill>
                   <a:srgbClr val="102A43"/>
                 </a:solidFill>
                 <a:latin typeface="Aptos"/>
               </a:rPr>
-              <a:t>A searchable campaign table with brand campaign IDs, brand names, company names, dates, and action buttons.</a:t>
-            </a:r>
-          </a:p>
-        </p:txBody>
-      </p:sp>
-      <p:sp>
-        <p:nvSpPr>
-          <p:cNvPr id="11" name="TextBox 10"/>
-          <p:cNvSpPr txBox="1"/>
-          <p:nvPr/>
-        </p:nvSpPr>
-        <p:spPr>
-          <a:xfrm>
-            <a:off x="749808" y="3063240"/>
-            <a:ext cx="4023360" cy="256032"/>
-          </a:xfrm>
-          <a:prstGeom prst="rect">
-            <a:avLst/>
-          </a:prstGeom>
-          <a:noFill/>
-        </p:spPr>
-        <p:txBody>
-          <a:bodyPr wrap="square" anchor="t">
-            <a:spAutoFit/>
-          </a:bodyPr>
-          <a:lstStyle/>
-          <a:p>
-            <a:pPr algn="l"/>
+              <a:t>A searchable campaign table with brand campaign IDs, brand names, company names, dates, and row buttons labeled `View`, `Edit`, `Collateral`, and `Field Reps`.</a:t>
+            </a:r>
+          </a:p>
+          <a:p>
+            <a:pPr algn="l">
+              <a:spcBef>
+                <a:spcPts val="0"/>
+              </a:spcBef>
+              <a:spcAft>
+                <a:spcPts val="200"/>
+              </a:spcAft>
+            </a:pPr>
             <a:r>
               <a:rPr sz="1200" b="1">
                 <a:solidFill>
@@ -4575,33 +4524,20 @@
               <a:t>Why it matters</a:t>
             </a:r>
           </a:p>
-        </p:txBody>
-      </p:sp>
-      <p:sp>
-        <p:nvSpPr>
-          <p:cNvPr id="12" name="TextBox 11"/>
-          <p:cNvSpPr txBox="1"/>
-          <p:nvPr/>
-        </p:nvSpPr>
-        <p:spPr>
-          <a:xfrm>
-            <a:off x="749808" y="3319272"/>
-            <a:ext cx="3931920" cy="640080"/>
-          </a:xfrm>
-          <a:prstGeom prst="rect">
-            <a:avLst/>
-          </a:prstGeom>
-          <a:noFill/>
-        </p:spPr>
-        <p:txBody>
-          <a:bodyPr wrap="square" anchor="t">
-            <a:spAutoFit/>
-          </a:bodyPr>
-          <a:lstStyle/>
-          <a:p>
-            <a:pPr algn="l"/>
-            <a:r>
-              <a:rPr sz="1500" b="0">
+          <a:p>
+            <a:pPr algn="l">
+              <a:lnSpc>
+                <a:spcPct val="110000"/>
+              </a:lnSpc>
+              <a:spcBef>
+                <a:spcPts val="0"/>
+              </a:spcBef>
+              <a:spcAft>
+                <a:spcPts val="800"/>
+              </a:spcAft>
+            </a:pPr>
+            <a:r>
+              <a:rPr sz="1300">
                 <a:solidFill>
                   <a:srgbClr val="102A43"/>
                 </a:solidFill>
@@ -4610,31 +4546,15 @@
               <a:t>This is the operational inventory of campaigns that can be maintained in the portal right now.</a:t>
             </a:r>
           </a:p>
-        </p:txBody>
-      </p:sp>
-      <p:sp>
-        <p:nvSpPr>
-          <p:cNvPr id="13" name="TextBox 12"/>
-          <p:cNvSpPr txBox="1"/>
-          <p:nvPr/>
-        </p:nvSpPr>
-        <p:spPr>
-          <a:xfrm>
-            <a:off x="749808" y="4069080"/>
-            <a:ext cx="4023360" cy="256032"/>
-          </a:xfrm>
-          <a:prstGeom prst="rect">
-            <a:avLst/>
-          </a:prstGeom>
-          <a:noFill/>
-        </p:spPr>
-        <p:txBody>
-          <a:bodyPr wrap="square" anchor="t">
-            <a:spAutoFit/>
-          </a:bodyPr>
-          <a:lstStyle/>
-          <a:p>
-            <a:pPr algn="l"/>
+          <a:p>
+            <a:pPr algn="l">
+              <a:spcBef>
+                <a:spcPts val="0"/>
+              </a:spcBef>
+              <a:spcAft>
+                <a:spcPts val="200"/>
+              </a:spcAft>
+            </a:pPr>
             <a:r>
               <a:rPr sz="1200" b="1">
                 <a:solidFill>
@@ -4645,33 +4565,20 @@
               <a:t>Expected result</a:t>
             </a:r>
           </a:p>
-        </p:txBody>
-      </p:sp>
-      <p:sp>
-        <p:nvSpPr>
-          <p:cNvPr id="14" name="TextBox 13"/>
-          <p:cNvSpPr txBox="1"/>
-          <p:nvPr/>
-        </p:nvSpPr>
-        <p:spPr>
-          <a:xfrm>
-            <a:off x="749808" y="4325112"/>
-            <a:ext cx="3931920" cy="566928"/>
-          </a:xfrm>
-          <a:prstGeom prst="rect">
-            <a:avLst/>
-          </a:prstGeom>
-          <a:noFill/>
-        </p:spPr>
-        <p:txBody>
-          <a:bodyPr wrap="square" anchor="t">
-            <a:spAutoFit/>
-          </a:bodyPr>
-          <a:lstStyle/>
-          <a:p>
-            <a:pPr algn="l"/>
-            <a:r>
-              <a:rPr sz="1500" b="0">
+          <a:p>
+            <a:pPr algn="l">
+              <a:lnSpc>
+                <a:spcPct val="110000"/>
+              </a:lnSpc>
+              <a:spcBef>
+                <a:spcPts val="0"/>
+              </a:spcBef>
+              <a:spcAft>
+                <a:spcPts val="800"/>
+              </a:spcAft>
+            </a:pPr>
+            <a:r>
+              <a:rPr sz="1300">
                 <a:solidFill>
                   <a:srgbClr val="102A43"/>
                 </a:solidFill>
@@ -4680,31 +4587,15 @@
               <a:t>The operator can quickly locate the campaign that needs work.</a:t>
             </a:r>
           </a:p>
-        </p:txBody>
-      </p:sp>
-      <p:sp>
-        <p:nvSpPr>
-          <p:cNvPr id="15" name="TextBox 14"/>
-          <p:cNvSpPr txBox="1"/>
-          <p:nvPr/>
-        </p:nvSpPr>
-        <p:spPr>
-          <a:xfrm>
-            <a:off x="749808" y="4965192"/>
-            <a:ext cx="4023360" cy="256032"/>
-          </a:xfrm>
-          <a:prstGeom prst="rect">
-            <a:avLst/>
-          </a:prstGeom>
-          <a:noFill/>
-        </p:spPr>
-        <p:txBody>
-          <a:bodyPr wrap="square" anchor="t">
-            <a:spAutoFit/>
-          </a:bodyPr>
-          <a:lstStyle/>
-          <a:p>
-            <a:pPr algn="l"/>
+          <a:p>
+            <a:pPr algn="l">
+              <a:spcBef>
+                <a:spcPts val="0"/>
+              </a:spcBef>
+              <a:spcAft>
+                <a:spcPts val="200"/>
+              </a:spcAft>
+            </a:pPr>
             <a:r>
               <a:rPr sz="1200" b="1">
                 <a:solidFill>
@@ -4715,46 +4606,33 @@
               <a:t>Trainer note</a:t>
             </a:r>
           </a:p>
-        </p:txBody>
-      </p:sp>
-      <p:sp>
-        <p:nvSpPr>
-          <p:cNvPr id="16" name="TextBox 15"/>
-          <p:cNvSpPr txBox="1"/>
-          <p:nvPr/>
-        </p:nvSpPr>
-        <p:spPr>
-          <a:xfrm>
-            <a:off x="749808" y="5212080"/>
-            <a:ext cx="3931920" cy="640080"/>
-          </a:xfrm>
-          <a:prstGeom prst="rect">
-            <a:avLst/>
-          </a:prstGeom>
-          <a:noFill/>
-        </p:spPr>
-        <p:txBody>
-          <a:bodyPr wrap="square" anchor="t">
-            <a:spAutoFit/>
-          </a:bodyPr>
-          <a:lstStyle/>
-          <a:p>
-            <a:pPr algn="l"/>
-            <a:r>
-              <a:rPr sz="1300" b="0">
+          <a:p>
+            <a:pPr algn="l">
+              <a:lnSpc>
+                <a:spcPct val="110000"/>
+              </a:lnSpc>
+              <a:spcBef>
+                <a:spcPts val="0"/>
+              </a:spcBef>
+              <a:spcAft>
+                <a:spcPts val="0"/>
+              </a:spcAft>
+            </a:pPr>
+            <a:r>
+              <a:rPr sz="1200">
                 <a:solidFill>
                   <a:srgbClr val="52667A"/>
                 </a:solidFill>
                 <a:latin typeface="Aptos"/>
               </a:rPr>
-              <a:t>The campaign list combines master data and local data; blank start or end dates usually mean the portal-side campaign row is not fully configured yet.</a:t>
-            </a:r>
-          </a:p>
-        </p:txBody>
-      </p:sp>
-      <p:sp>
-        <p:nvSpPr>
-          <p:cNvPr id="17" name="Rounded Rectangle 16"/>
+              <a:t>The live-search field debounces and refreshes the URL query string automatically. Blank start or end dates usually mean the portal-side campaign row is not fully configured yet.</a:t>
+            </a:r>
+          </a:p>
+        </p:txBody>
+      </p:sp>
+      <p:sp>
+        <p:nvSpPr>
+          <p:cNvPr id="8" name="Rounded Rectangle 7"/>
           <p:cNvSpPr/>
           <p:nvPr/>
         </p:nvSpPr>
@@ -4799,7 +4677,7 @@
       </p:sp>
       <p:sp>
         <p:nvSpPr>
-          <p:cNvPr id="18" name="TextBox 17"/>
+          <p:cNvPr id="9" name="TextBox 8"/>
           <p:cNvSpPr txBox="1"/>
           <p:nvPr/>
         </p:nvSpPr>
@@ -4834,7 +4712,7 @@
       </p:sp>
       <p:pic>
         <p:nvPicPr>
-          <p:cNvPr id="19" name="Picture 18" descr="manage-data-panel.png"/>
+          <p:cNvPr id="10" name="Picture 9" descr="manage-data-panel.png"/>
           <p:cNvPicPr>
             <a:picLocks noChangeAspect="1"/>
           </p:cNvPicPr>
@@ -4858,7 +4736,7 @@
       </p:pic>
       <p:sp>
         <p:nvSpPr>
-          <p:cNvPr id="20" name="TextBox 19"/>
+          <p:cNvPr id="11" name="TextBox 10"/>
           <p:cNvSpPr txBox="1"/>
           <p:nvPr/>
         </p:nvSpPr>
@@ -4893,7 +4771,7 @@
       </p:sp>
       <p:sp>
         <p:nvSpPr>
-          <p:cNvPr id="21" name="TextBox 20"/>
+          <p:cNvPr id="12" name="TextBox 11"/>
           <p:cNvSpPr txBox="1"/>
           <p:nvPr/>
         </p:nvSpPr>
@@ -5166,7 +5044,7 @@
         <p:spPr>
           <a:xfrm>
             <a:off x="749808" y="1097280"/>
-            <a:ext cx="4023360" cy="256032"/>
+            <a:ext cx="3931920" cy="4754880"/>
           </a:xfrm>
           <a:prstGeom prst="rect">
             <a:avLst/>
@@ -5174,12 +5052,19 @@
           <a:noFill/>
         </p:spPr>
         <p:txBody>
-          <a:bodyPr wrap="square" anchor="t">
+          <a:bodyPr wrap="square" lIns="0" rIns="0" tIns="0" bIns="0">
             <a:spAutoFit/>
           </a:bodyPr>
           <a:lstStyle/>
           <a:p>
-            <a:pPr algn="l"/>
+            <a:pPr algn="l">
+              <a:spcBef>
+                <a:spcPts val="0"/>
+              </a:spcBef>
+              <a:spcAft>
+                <a:spcPts val="200"/>
+              </a:spcAft>
+            </a:pPr>
             <a:r>
               <a:rPr sz="1200" b="1">
                 <a:solidFill>
@@ -5190,33 +5075,20 @@
               <a:t>User action</a:t>
             </a:r>
           </a:p>
-        </p:txBody>
-      </p:sp>
-      <p:sp>
-        <p:nvSpPr>
-          <p:cNvPr id="8" name="TextBox 7"/>
-          <p:cNvSpPr txBox="1"/>
-          <p:nvPr/>
-        </p:nvSpPr>
-        <p:spPr>
-          <a:xfrm>
-            <a:off x="749808" y="1353312"/>
-            <a:ext cx="3931920" cy="621792"/>
-          </a:xfrm>
-          <a:prstGeom prst="rect">
-            <a:avLst/>
-          </a:prstGeom>
-          <a:noFill/>
-        </p:spPr>
-        <p:txBody>
-          <a:bodyPr wrap="square" anchor="t">
-            <a:spAutoFit/>
-          </a:bodyPr>
-          <a:lstStyle/>
-          <a:p>
-            <a:pPr algn="l"/>
-            <a:r>
-              <a:rPr sz="1600" b="0">
+          <a:p>
+            <a:pPr algn="l">
+              <a:lnSpc>
+                <a:spcPct val="110000"/>
+              </a:lnSpc>
+              <a:spcBef>
+                <a:spcPts val="0"/>
+              </a:spcBef>
+              <a:spcAft>
+                <a:spcPts val="800"/>
+              </a:spcAft>
+            </a:pPr>
+            <a:r>
+              <a:rPr sz="1200">
                 <a:solidFill>
                   <a:srgbClr val="102A43"/>
                 </a:solidFill>
@@ -5225,31 +5097,15 @@
               <a:t>Use the live search field and open the selected campaign's view or edit route.</a:t>
             </a:r>
           </a:p>
-        </p:txBody>
-      </p:sp>
-      <p:sp>
-        <p:nvSpPr>
-          <p:cNvPr id="9" name="TextBox 8"/>
-          <p:cNvSpPr txBox="1"/>
-          <p:nvPr/>
-        </p:nvSpPr>
-        <p:spPr>
-          <a:xfrm>
-            <a:off x="749808" y="2011680"/>
-            <a:ext cx="4023360" cy="256032"/>
-          </a:xfrm>
-          <a:prstGeom prst="rect">
-            <a:avLst/>
-          </a:prstGeom>
-          <a:noFill/>
-        </p:spPr>
-        <p:txBody>
-          <a:bodyPr wrap="square" anchor="t">
-            <a:spAutoFit/>
-          </a:bodyPr>
-          <a:lstStyle/>
-          <a:p>
-            <a:pPr algn="l"/>
+          <a:p>
+            <a:pPr algn="l">
+              <a:spcBef>
+                <a:spcPts val="0"/>
+              </a:spcBef>
+              <a:spcAft>
+                <a:spcPts val="200"/>
+              </a:spcAft>
+            </a:pPr>
             <a:r>
               <a:rPr sz="1200" b="1">
                 <a:solidFill>
@@ -5260,66 +5116,37 @@
               <a:t>What appears on screen</a:t>
             </a:r>
           </a:p>
-        </p:txBody>
-      </p:sp>
-      <p:sp>
-        <p:nvSpPr>
-          <p:cNvPr id="10" name="TextBox 9"/>
-          <p:cNvSpPr txBox="1"/>
-          <p:nvPr/>
-        </p:nvSpPr>
-        <p:spPr>
-          <a:xfrm>
-            <a:off x="749808" y="2267712"/>
-            <a:ext cx="3931920" cy="713232"/>
-          </a:xfrm>
-          <a:prstGeom prst="rect">
-            <a:avLst/>
-          </a:prstGeom>
-          <a:noFill/>
-        </p:spPr>
-        <p:txBody>
-          <a:bodyPr wrap="square" anchor="t">
-            <a:spAutoFit/>
-          </a:bodyPr>
-          <a:lstStyle/>
-          <a:p>
-            <a:pPr algn="l"/>
-            <a:r>
-              <a:rPr sz="1600" b="0">
+          <a:p>
+            <a:pPr algn="l">
+              <a:lnSpc>
+                <a:spcPct val="110000"/>
+              </a:lnSpc>
+              <a:spcBef>
+                <a:spcPts val="0"/>
+              </a:spcBef>
+              <a:spcAft>
+                <a:spcPts val="800"/>
+              </a:spcAft>
+            </a:pPr>
+            <a:r>
+              <a:rPr sz="1200">
                 <a:solidFill>
                   <a:srgbClr val="102A43"/>
                 </a:solidFill>
                 <a:latin typeface="Aptos"/>
               </a:rPr>
-              <a:t>A campaign-specific page where the operator can inspect current metadata and decide which downstream tool to use next.</a:t>
-            </a:r>
-          </a:p>
-        </p:txBody>
-      </p:sp>
-      <p:sp>
-        <p:nvSpPr>
-          <p:cNvPr id="11" name="TextBox 10"/>
-          <p:cNvSpPr txBox="1"/>
-          <p:nvPr/>
-        </p:nvSpPr>
-        <p:spPr>
-          <a:xfrm>
-            <a:off x="749808" y="3063240"/>
-            <a:ext cx="4023360" cy="256032"/>
-          </a:xfrm>
-          <a:prstGeom prst="rect">
-            <a:avLst/>
-          </a:prstGeom>
-          <a:noFill/>
-        </p:spPr>
-        <p:txBody>
-          <a:bodyPr wrap="square" anchor="t">
-            <a:spAutoFit/>
-          </a:bodyPr>
-          <a:lstStyle/>
-          <a:p>
-            <a:pPr algn="l"/>
+              <a:t>A campaign detail or campaign update page where the operator can confirm the local description, dates, status, and other portal-side metadata for the selected brand campaign.</a:t>
+            </a:r>
+          </a:p>
+          <a:p>
+            <a:pPr algn="l">
+              <a:spcBef>
+                <a:spcPts val="0"/>
+              </a:spcBef>
+              <a:spcAft>
+                <a:spcPts val="200"/>
+              </a:spcAft>
+            </a:pPr>
             <a:r>
               <a:rPr sz="1200" b="1">
                 <a:solidFill>
@@ -5330,33 +5157,20 @@
               <a:t>Why it matters</a:t>
             </a:r>
           </a:p>
-        </p:txBody>
-      </p:sp>
-      <p:sp>
-        <p:nvSpPr>
-          <p:cNvPr id="12" name="TextBox 11"/>
-          <p:cNvSpPr txBox="1"/>
-          <p:nvPr/>
-        </p:nvSpPr>
-        <p:spPr>
-          <a:xfrm>
-            <a:off x="749808" y="3319272"/>
-            <a:ext cx="3931920" cy="640080"/>
-          </a:xfrm>
-          <a:prstGeom prst="rect">
-            <a:avLst/>
-          </a:prstGeom>
-          <a:noFill/>
-        </p:spPr>
-        <p:txBody>
-          <a:bodyPr wrap="square" anchor="t">
-            <a:spAutoFit/>
-          </a:bodyPr>
-          <a:lstStyle/>
-          <a:p>
-            <a:pPr algn="l"/>
-            <a:r>
-              <a:rPr sz="1500" b="0">
+          <a:p>
+            <a:pPr algn="l">
+              <a:lnSpc>
+                <a:spcPct val="110000"/>
+              </a:lnSpc>
+              <a:spcBef>
+                <a:spcPts val="0"/>
+              </a:spcBef>
+              <a:spcAft>
+                <a:spcPts val="800"/>
+              </a:spcAft>
+            </a:pPr>
+            <a:r>
+              <a:rPr sz="1200">
                 <a:solidFill>
                   <a:srgbClr val="102A43"/>
                 </a:solidFill>
@@ -5365,31 +5179,15 @@
               <a:t>Operators rarely work on every campaign at once; the panel is meant to narrow attention to a single campaign quickly.</a:t>
             </a:r>
           </a:p>
-        </p:txBody>
-      </p:sp>
-      <p:sp>
-        <p:nvSpPr>
-          <p:cNvPr id="13" name="TextBox 12"/>
-          <p:cNvSpPr txBox="1"/>
-          <p:nvPr/>
-        </p:nvSpPr>
-        <p:spPr>
-          <a:xfrm>
-            <a:off x="749808" y="4069080"/>
-            <a:ext cx="4023360" cy="256032"/>
-          </a:xfrm>
-          <a:prstGeom prst="rect">
-            <a:avLst/>
-          </a:prstGeom>
-          <a:noFill/>
-        </p:spPr>
-        <p:txBody>
-          <a:bodyPr wrap="square" anchor="t">
-            <a:spAutoFit/>
-          </a:bodyPr>
-          <a:lstStyle/>
-          <a:p>
-            <a:pPr algn="l"/>
+          <a:p>
+            <a:pPr algn="l">
+              <a:spcBef>
+                <a:spcPts val="0"/>
+              </a:spcBef>
+              <a:spcAft>
+                <a:spcPts val="200"/>
+              </a:spcAft>
+            </a:pPr>
             <a:r>
               <a:rPr sz="1200" b="1">
                 <a:solidFill>
@@ -5400,33 +5198,20 @@
               <a:t>Expected result</a:t>
             </a:r>
           </a:p>
-        </p:txBody>
-      </p:sp>
-      <p:sp>
-        <p:nvSpPr>
-          <p:cNvPr id="14" name="TextBox 13"/>
-          <p:cNvSpPr txBox="1"/>
-          <p:nvPr/>
-        </p:nvSpPr>
-        <p:spPr>
-          <a:xfrm>
-            <a:off x="749808" y="4325112"/>
-            <a:ext cx="3931920" cy="566928"/>
-          </a:xfrm>
-          <a:prstGeom prst="rect">
-            <a:avLst/>
-          </a:prstGeom>
-          <a:noFill/>
-        </p:spPr>
-        <p:txBody>
-          <a:bodyPr wrap="square" anchor="t">
-            <a:spAutoFit/>
-          </a:bodyPr>
-          <a:lstStyle/>
-          <a:p>
-            <a:pPr algn="l"/>
-            <a:r>
-              <a:rPr sz="1500" b="0">
+          <a:p>
+            <a:pPr algn="l">
+              <a:lnSpc>
+                <a:spcPct val="110000"/>
+              </a:lnSpc>
+              <a:spcBef>
+                <a:spcPts val="0"/>
+              </a:spcBef>
+              <a:spcAft>
+                <a:spcPts val="800"/>
+              </a:spcAft>
+            </a:pPr>
+            <a:r>
+              <a:rPr sz="1200">
                 <a:solidFill>
                   <a:srgbClr val="102A43"/>
                 </a:solidFill>
@@ -5435,31 +5220,15 @@
               <a:t>The campaign row that matters is isolated and ready for action.</a:t>
             </a:r>
           </a:p>
-        </p:txBody>
-      </p:sp>
-      <p:sp>
-        <p:nvSpPr>
-          <p:cNvPr id="15" name="TextBox 14"/>
-          <p:cNvSpPr txBox="1"/>
-          <p:nvPr/>
-        </p:nvSpPr>
-        <p:spPr>
-          <a:xfrm>
-            <a:off x="749808" y="4965192"/>
-            <a:ext cx="4023360" cy="256032"/>
-          </a:xfrm>
-          <a:prstGeom prst="rect">
-            <a:avLst/>
-          </a:prstGeom>
-          <a:noFill/>
-        </p:spPr>
-        <p:txBody>
-          <a:bodyPr wrap="square" anchor="t">
-            <a:spAutoFit/>
-          </a:bodyPr>
-          <a:lstStyle/>
-          <a:p>
-            <a:pPr algn="l"/>
+          <a:p>
+            <a:pPr algn="l">
+              <a:spcBef>
+                <a:spcPts val="0"/>
+              </a:spcBef>
+              <a:spcAft>
+                <a:spcPts val="200"/>
+              </a:spcAft>
+            </a:pPr>
             <a:r>
               <a:rPr sz="1200" b="1">
                 <a:solidFill>
@@ -5470,46 +5239,33 @@
               <a:t>Trainer note</a:t>
             </a:r>
           </a:p>
-        </p:txBody>
-      </p:sp>
-      <p:sp>
-        <p:nvSpPr>
-          <p:cNvPr id="16" name="TextBox 15"/>
-          <p:cNvSpPr txBox="1"/>
-          <p:nvPr/>
-        </p:nvSpPr>
-        <p:spPr>
-          <a:xfrm>
-            <a:off x="749808" y="5212080"/>
-            <a:ext cx="3931920" cy="640080"/>
-          </a:xfrm>
-          <a:prstGeom prst="rect">
-            <a:avLst/>
-          </a:prstGeom>
-          <a:noFill/>
-        </p:spPr>
-        <p:txBody>
-          <a:bodyPr wrap="square" anchor="t">
-            <a:spAutoFit/>
-          </a:bodyPr>
-          <a:lstStyle/>
-          <a:p>
-            <a:pPr algn="l"/>
-            <a:r>
-              <a:rPr sz="1300" b="0">
+          <a:p>
+            <a:pPr algn="l">
+              <a:lnSpc>
+                <a:spcPct val="110000"/>
+              </a:lnSpc>
+              <a:spcBef>
+                <a:spcPts val="0"/>
+              </a:spcBef>
+              <a:spcAft>
+                <a:spcPts val="0"/>
+              </a:spcAft>
+            </a:pPr>
+            <a:r>
+              <a:rPr sz="1100">
                 <a:solidFill>
                   <a:srgbClr val="52667A"/>
                 </a:solidFill>
                 <a:latin typeface="Aptos"/>
               </a:rPr>
-              <a:t>In the current product, the view and edit buttons are usually enough to verify whether a portal campaign row already exists for a master campaign.</a:t>
-            </a:r>
-          </a:p>
-        </p:txBody>
-      </p:sp>
-      <p:sp>
-        <p:nvSpPr>
-          <p:cNvPr id="17" name="Rounded Rectangle 16"/>
+              <a:t>Use `View` when you only need a quick read of the campaign, and `Edit` when you need to change the PE-side metadata or inspect the master read-only fields in more depth.</a:t>
+            </a:r>
+          </a:p>
+        </p:txBody>
+      </p:sp>
+      <p:sp>
+        <p:nvSpPr>
+          <p:cNvPr id="8" name="Rounded Rectangle 7"/>
           <p:cNvSpPr/>
           <p:nvPr/>
         </p:nvSpPr>
@@ -5554,7 +5310,7 @@
       </p:sp>
       <p:sp>
         <p:nvSpPr>
-          <p:cNvPr id="18" name="TextBox 17"/>
+          <p:cNvPr id="9" name="TextBox 8"/>
           <p:cNvSpPr txBox="1"/>
           <p:nvPr/>
         </p:nvSpPr>
@@ -5589,7 +5345,7 @@
       </p:sp>
       <p:pic>
         <p:nvPicPr>
-          <p:cNvPr id="19" name="Picture 18" descr="campaign-detail.png"/>
+          <p:cNvPr id="10" name="Picture 9" descr="campaign-detail.png"/>
           <p:cNvPicPr>
             <a:picLocks noChangeAspect="1"/>
           </p:cNvPicPr>
@@ -5613,7 +5369,7 @@
       </p:pic>
       <p:sp>
         <p:nvSpPr>
-          <p:cNvPr id="20" name="TextBox 19"/>
+          <p:cNvPr id="11" name="TextBox 10"/>
           <p:cNvSpPr txBox="1"/>
           <p:nvPr/>
         </p:nvSpPr>
@@ -5648,7 +5404,7 @@
       </p:sp>
       <p:sp>
         <p:nvSpPr>
-          <p:cNvPr id="21" name="TextBox 20"/>
+          <p:cNvPr id="12" name="TextBox 11"/>
           <p:cNvSpPr txBox="1"/>
           <p:nvPr/>
         </p:nvSpPr>
@@ -5921,7 +5677,7 @@
         <p:spPr>
           <a:xfrm>
             <a:off x="749808" y="1097280"/>
-            <a:ext cx="4023360" cy="256032"/>
+            <a:ext cx="3931920" cy="4754880"/>
           </a:xfrm>
           <a:prstGeom prst="rect">
             <a:avLst/>
@@ -5929,12 +5685,19 @@
           <a:noFill/>
         </p:spPr>
         <p:txBody>
-          <a:bodyPr wrap="square" anchor="t">
+          <a:bodyPr wrap="square" lIns="0" rIns="0" tIns="0" bIns="0">
             <a:spAutoFit/>
           </a:bodyPr>
           <a:lstStyle/>
           <a:p>
-            <a:pPr algn="l"/>
+            <a:pPr algn="l">
+              <a:spcBef>
+                <a:spcPts val="0"/>
+              </a:spcBef>
+              <a:spcAft>
+                <a:spcPts val="200"/>
+              </a:spcAft>
+            </a:pPr>
             <a:r>
               <a:rPr sz="1200" b="1">
                 <a:solidFill>
@@ -5945,33 +5708,20 @@
               <a:t>User action</a:t>
             </a:r>
           </a:p>
-        </p:txBody>
-      </p:sp>
-      <p:sp>
-        <p:nvSpPr>
-          <p:cNvPr id="8" name="TextBox 7"/>
-          <p:cNvSpPr txBox="1"/>
-          <p:nvPr/>
-        </p:nvSpPr>
-        <p:spPr>
-          <a:xfrm>
-            <a:off x="749808" y="1353312"/>
-            <a:ext cx="3931920" cy="621792"/>
-          </a:xfrm>
-          <a:prstGeom prst="rect">
-            <a:avLst/>
-          </a:prstGeom>
-          <a:noFill/>
-        </p:spPr>
-        <p:txBody>
-          <a:bodyPr wrap="square" anchor="t">
-            <a:spAutoFit/>
-          </a:bodyPr>
-          <a:lstStyle/>
-          <a:p>
-            <a:pPr algn="l"/>
-            <a:r>
-              <a:rPr sz="1600" b="0">
+          <a:p>
+            <a:pPr algn="l">
+              <a:lnSpc>
+                <a:spcPct val="110000"/>
+              </a:lnSpc>
+              <a:spcBef>
+                <a:spcPts val="0"/>
+              </a:spcBef>
+              <a:spcAft>
+                <a:spcPts val="800"/>
+              </a:spcAft>
+            </a:pPr>
+            <a:r>
+              <a:rPr sz="1200">
                 <a:solidFill>
                   <a:srgbClr val="102A43"/>
                 </a:solidFill>
@@ -5980,31 +5730,15 @@
               <a:t>Choose the shortcut for collateral management or field-rep management from the same row.</a:t>
             </a:r>
           </a:p>
-        </p:txBody>
-      </p:sp>
-      <p:sp>
-        <p:nvSpPr>
-          <p:cNvPr id="9" name="TextBox 8"/>
-          <p:cNvSpPr txBox="1"/>
-          <p:nvPr/>
-        </p:nvSpPr>
-        <p:spPr>
-          <a:xfrm>
-            <a:off x="749808" y="2011680"/>
-            <a:ext cx="4023360" cy="256032"/>
-          </a:xfrm>
-          <a:prstGeom prst="rect">
-            <a:avLst/>
-          </a:prstGeom>
-          <a:noFill/>
-        </p:spPr>
-        <p:txBody>
-          <a:bodyPr wrap="square" anchor="t">
-            <a:spAutoFit/>
-          </a:bodyPr>
-          <a:lstStyle/>
-          <a:p>
-            <a:pPr algn="l"/>
+          <a:p>
+            <a:pPr algn="l">
+              <a:spcBef>
+                <a:spcPts val="0"/>
+              </a:spcBef>
+              <a:spcAft>
+                <a:spcPts val="200"/>
+              </a:spcAft>
+            </a:pPr>
             <a:r>
               <a:rPr sz="1200" b="1">
                 <a:solidFill>
@@ -6015,66 +5749,37 @@
               <a:t>What appears on screen</a:t>
             </a:r>
           </a:p>
-        </p:txBody>
-      </p:sp>
-      <p:sp>
-        <p:nvSpPr>
-          <p:cNvPr id="10" name="TextBox 9"/>
-          <p:cNvSpPr txBox="1"/>
-          <p:nvPr/>
-        </p:nvSpPr>
-        <p:spPr>
-          <a:xfrm>
-            <a:off x="749808" y="2267712"/>
-            <a:ext cx="3931920" cy="713232"/>
-          </a:xfrm>
-          <a:prstGeom prst="rect">
-            <a:avLst/>
-          </a:prstGeom>
-          <a:noFill/>
-        </p:spPr>
-        <p:txBody>
-          <a:bodyPr wrap="square" anchor="t">
-            <a:spAutoFit/>
-          </a:bodyPr>
-          <a:lstStyle/>
-          <a:p>
-            <a:pPr algn="l"/>
-            <a:r>
-              <a:rPr sz="1600" b="0">
+          <a:p>
+            <a:pPr algn="l">
+              <a:lnSpc>
+                <a:spcPct val="110000"/>
+              </a:lnSpc>
+              <a:spcBef>
+                <a:spcPts val="0"/>
+              </a:spcBef>
+              <a:spcAft>
+                <a:spcPts val="800"/>
+              </a:spcAft>
+            </a:pPr>
+            <a:r>
+              <a:rPr sz="1200">
                 <a:solidFill>
                   <a:srgbClr val="102A43"/>
                 </a:solidFill>
                 <a:latin typeface="Aptos"/>
               </a:rPr>
-              <a:t>A new tab that opens the downstream route with the campaign already filtered.</a:t>
-            </a:r>
-          </a:p>
-        </p:txBody>
-      </p:sp>
-      <p:sp>
-        <p:nvSpPr>
-          <p:cNvPr id="11" name="TextBox 10"/>
-          <p:cNvSpPr txBox="1"/>
-          <p:nvPr/>
-        </p:nvSpPr>
-        <p:spPr>
-          <a:xfrm>
-            <a:off x="749808" y="3063240"/>
-            <a:ext cx="4023360" cy="256032"/>
-          </a:xfrm>
-          <a:prstGeom prst="rect">
-            <a:avLst/>
-          </a:prstGeom>
-          <a:noFill/>
-        </p:spPr>
-        <p:txBody>
-          <a:bodyPr wrap="square" anchor="t">
-            <a:spAutoFit/>
-          </a:bodyPr>
-          <a:lstStyle/>
-          <a:p>
-            <a:pPr algn="l"/>
+              <a:t>A new tab that opens either the collateral dashboard or the field-rep administration list with the same brand campaign ID already carried into the next screen.</a:t>
+            </a:r>
+          </a:p>
+          <a:p>
+            <a:pPr algn="l">
+              <a:spcBef>
+                <a:spcPts val="0"/>
+              </a:spcBef>
+              <a:spcAft>
+                <a:spcPts val="200"/>
+              </a:spcAft>
+            </a:pPr>
             <a:r>
               <a:rPr sz="1200" b="1">
                 <a:solidFill>
@@ -6085,33 +5790,20 @@
               <a:t>Why it matters</a:t>
             </a:r>
           </a:p>
-        </p:txBody>
-      </p:sp>
-      <p:sp>
-        <p:nvSpPr>
-          <p:cNvPr id="12" name="TextBox 11"/>
-          <p:cNvSpPr txBox="1"/>
-          <p:nvPr/>
-        </p:nvSpPr>
-        <p:spPr>
-          <a:xfrm>
-            <a:off x="749808" y="3319272"/>
-            <a:ext cx="3931920" cy="640080"/>
-          </a:xfrm>
-          <a:prstGeom prst="rect">
-            <a:avLst/>
-          </a:prstGeom>
-          <a:noFill/>
-        </p:spPr>
-        <p:txBody>
-          <a:bodyPr wrap="square" anchor="t">
-            <a:spAutoFit/>
-          </a:bodyPr>
-          <a:lstStyle/>
-          <a:p>
-            <a:pPr algn="l"/>
-            <a:r>
-              <a:rPr sz="1500" b="0">
+          <a:p>
+            <a:pPr algn="l">
+              <a:lnSpc>
+                <a:spcPct val="110000"/>
+              </a:lnSpc>
+              <a:spcBef>
+                <a:spcPts val="0"/>
+              </a:spcBef>
+              <a:spcAft>
+                <a:spcPts val="800"/>
+              </a:spcAft>
+            </a:pPr>
+            <a:r>
+              <a:rPr sz="1200">
                 <a:solidFill>
                   <a:srgbClr val="102A43"/>
                 </a:solidFill>
@@ -6120,31 +5812,15 @@
               <a:t>The Manage Data Panel is meant to hand campaign context forward instead of forcing users to re-enter campaign IDs elsewhere.</a:t>
             </a:r>
           </a:p>
-        </p:txBody>
-      </p:sp>
-      <p:sp>
-        <p:nvSpPr>
-          <p:cNvPr id="13" name="TextBox 12"/>
-          <p:cNvSpPr txBox="1"/>
-          <p:nvPr/>
-        </p:nvSpPr>
-        <p:spPr>
-          <a:xfrm>
-            <a:off x="749808" y="4069080"/>
-            <a:ext cx="4023360" cy="256032"/>
-          </a:xfrm>
-          <a:prstGeom prst="rect">
-            <a:avLst/>
-          </a:prstGeom>
-          <a:noFill/>
-        </p:spPr>
-        <p:txBody>
-          <a:bodyPr wrap="square" anchor="t">
-            <a:spAutoFit/>
-          </a:bodyPr>
-          <a:lstStyle/>
-          <a:p>
-            <a:pPr algn="l"/>
+          <a:p>
+            <a:pPr algn="l">
+              <a:spcBef>
+                <a:spcPts val="0"/>
+              </a:spcBef>
+              <a:spcAft>
+                <a:spcPts val="200"/>
+              </a:spcAft>
+            </a:pPr>
             <a:r>
               <a:rPr sz="1200" b="1">
                 <a:solidFill>
@@ -6155,33 +5831,20 @@
               <a:t>Expected result</a:t>
             </a:r>
           </a:p>
-        </p:txBody>
-      </p:sp>
-      <p:sp>
-        <p:nvSpPr>
-          <p:cNvPr id="14" name="TextBox 13"/>
-          <p:cNvSpPr txBox="1"/>
-          <p:nvPr/>
-        </p:nvSpPr>
-        <p:spPr>
-          <a:xfrm>
-            <a:off x="749808" y="4325112"/>
-            <a:ext cx="3931920" cy="566928"/>
-          </a:xfrm>
-          <a:prstGeom prst="rect">
-            <a:avLst/>
-          </a:prstGeom>
-          <a:noFill/>
-        </p:spPr>
-        <p:txBody>
-          <a:bodyPr wrap="square" anchor="t">
-            <a:spAutoFit/>
-          </a:bodyPr>
-          <a:lstStyle/>
-          <a:p>
-            <a:pPr algn="l"/>
-            <a:r>
-              <a:rPr sz="1500" b="0">
+          <a:p>
+            <a:pPr algn="l">
+              <a:lnSpc>
+                <a:spcPct val="110000"/>
+              </a:lnSpc>
+              <a:spcBef>
+                <a:spcPts val="0"/>
+              </a:spcBef>
+              <a:spcAft>
+                <a:spcPts val="800"/>
+              </a:spcAft>
+            </a:pPr>
+            <a:r>
+              <a:rPr sz="1200">
                 <a:solidFill>
                   <a:srgbClr val="102A43"/>
                 </a:solidFill>
@@ -6190,31 +5853,15 @@
               <a:t>The next workflow opens already focused on the same brand campaign.</a:t>
             </a:r>
           </a:p>
-        </p:txBody>
-      </p:sp>
-      <p:sp>
-        <p:nvSpPr>
-          <p:cNvPr id="15" name="TextBox 14"/>
-          <p:cNvSpPr txBox="1"/>
-          <p:nvPr/>
-        </p:nvSpPr>
-        <p:spPr>
-          <a:xfrm>
-            <a:off x="749808" y="4965192"/>
-            <a:ext cx="4023360" cy="256032"/>
-          </a:xfrm>
-          <a:prstGeom prst="rect">
-            <a:avLst/>
-          </a:prstGeom>
-          <a:noFill/>
-        </p:spPr>
-        <p:txBody>
-          <a:bodyPr wrap="square" anchor="t">
-            <a:spAutoFit/>
-          </a:bodyPr>
-          <a:lstStyle/>
-          <a:p>
-            <a:pPr algn="l"/>
+          <a:p>
+            <a:pPr algn="l">
+              <a:spcBef>
+                <a:spcPts val="0"/>
+              </a:spcBef>
+              <a:spcAft>
+                <a:spcPts val="200"/>
+              </a:spcAft>
+            </a:pPr>
             <a:r>
               <a:rPr sz="1200" b="1">
                 <a:solidFill>
@@ -6225,46 +5872,33 @@
               <a:t>Trainer note</a:t>
             </a:r>
           </a:p>
-        </p:txBody>
-      </p:sp>
-      <p:sp>
-        <p:nvSpPr>
-          <p:cNvPr id="16" name="TextBox 15"/>
-          <p:cNvSpPr txBox="1"/>
-          <p:nvPr/>
-        </p:nvSpPr>
-        <p:spPr>
-          <a:xfrm>
-            <a:off x="749808" y="5212080"/>
-            <a:ext cx="3931920" cy="640080"/>
-          </a:xfrm>
-          <a:prstGeom prst="rect">
-            <a:avLst/>
-          </a:prstGeom>
-          <a:noFill/>
-        </p:spPr>
-        <p:txBody>
-          <a:bodyPr wrap="square" anchor="t">
-            <a:spAutoFit/>
-          </a:bodyPr>
-          <a:lstStyle/>
-          <a:p>
-            <a:pPr algn="l"/>
-            <a:r>
-              <a:rPr sz="1300" b="0">
+          <a:p>
+            <a:pPr algn="l">
+              <a:lnSpc>
+                <a:spcPct val="110000"/>
+              </a:lnSpc>
+              <a:spcBef>
+                <a:spcPts val="0"/>
+              </a:spcBef>
+              <a:spcAft>
+                <a:spcPts val="0"/>
+              </a:spcAft>
+            </a:pPr>
+            <a:r>
+              <a:rPr sz="1100">
                 <a:solidFill>
                   <a:srgbClr val="52667A"/>
                 </a:solidFill>
                 <a:latin typeface="Aptos"/>
               </a:rPr>
-              <a:t>This is where trainers should explain the campaign UUID as the shared handoff key across the product.</a:t>
-            </a:r>
-          </a:p>
-        </p:txBody>
-      </p:sp>
-      <p:sp>
-        <p:nvSpPr>
-          <p:cNvPr id="17" name="Rounded Rectangle 16"/>
+              <a:t>This is where trainers should explain the brand campaign ID as the shared handoff key across the product. The `Collateral` button opens the rep-facing collateral dashboard, and `Field Reps` opens the staff rep list.</a:t>
+            </a:r>
+          </a:p>
+        </p:txBody>
+      </p:sp>
+      <p:sp>
+        <p:nvSpPr>
+          <p:cNvPr id="8" name="Rounded Rectangle 7"/>
           <p:cNvSpPr/>
           <p:nvPr/>
         </p:nvSpPr>
@@ -6309,7 +5943,7 @@
       </p:sp>
       <p:sp>
         <p:nvSpPr>
-          <p:cNvPr id="18" name="TextBox 17"/>
+          <p:cNvPr id="9" name="TextBox 8"/>
           <p:cNvSpPr txBox="1"/>
           <p:nvPr/>
         </p:nvSpPr>
@@ -6344,7 +5978,7 @@
       </p:sp>
       <p:pic>
         <p:nvPicPr>
-          <p:cNvPr id="19" name="Picture 18" descr="manage-data-panel.png"/>
+          <p:cNvPr id="10" name="Picture 9" descr="manage-data-panel.png"/>
           <p:cNvPicPr>
             <a:picLocks noChangeAspect="1"/>
           </p:cNvPicPr>
@@ -6368,7 +6002,7 @@
       </p:pic>
       <p:sp>
         <p:nvSpPr>
-          <p:cNvPr id="20" name="TextBox 19"/>
+          <p:cNvPr id="11" name="TextBox 10"/>
           <p:cNvSpPr txBox="1"/>
           <p:nvPr/>
         </p:nvSpPr>
@@ -6403,7 +6037,7 @@
       </p:sp>
       <p:sp>
         <p:nvSpPr>
-          <p:cNvPr id="21" name="TextBox 20"/>
+          <p:cNvPr id="12" name="TextBox 11"/>
           <p:cNvSpPr txBox="1"/>
           <p:nvPr/>
         </p:nvSpPr>
@@ -6676,7 +6310,7 @@
         <p:spPr>
           <a:xfrm>
             <a:off x="749808" y="1097280"/>
-            <a:ext cx="4023360" cy="256032"/>
+            <a:ext cx="3931920" cy="4754880"/>
           </a:xfrm>
           <a:prstGeom prst="rect">
             <a:avLst/>
@@ -6684,12 +6318,19 @@
           <a:noFill/>
         </p:spPr>
         <p:txBody>
-          <a:bodyPr wrap="square" anchor="t">
+          <a:bodyPr wrap="square" lIns="0" rIns="0" tIns="0" bIns="0">
             <a:spAutoFit/>
           </a:bodyPr>
           <a:lstStyle/>
           <a:p>
-            <a:pPr algn="l"/>
+            <a:pPr algn="l">
+              <a:spcBef>
+                <a:spcPts val="0"/>
+              </a:spcBef>
+              <a:spcAft>
+                <a:spcPts val="200"/>
+              </a:spcAft>
+            </a:pPr>
             <a:r>
               <a:rPr sz="1200" b="1">
                 <a:solidFill>
@@ -6700,33 +6341,20 @@
               <a:t>User action</a:t>
             </a:r>
           </a:p>
-        </p:txBody>
-      </p:sp>
-      <p:sp>
-        <p:nvSpPr>
-          <p:cNvPr id="8" name="TextBox 7"/>
-          <p:cNvSpPr txBox="1"/>
-          <p:nvPr/>
-        </p:nvSpPr>
-        <p:spPr>
-          <a:xfrm>
-            <a:off x="749808" y="1353312"/>
-            <a:ext cx="3931920" cy="621792"/>
-          </a:xfrm>
-          <a:prstGeom prst="rect">
-            <a:avLst/>
-          </a:prstGeom>
-          <a:noFill/>
-        </p:spPr>
-        <p:txBody>
-          <a:bodyPr wrap="square" anchor="t">
-            <a:spAutoFit/>
-          </a:bodyPr>
-          <a:lstStyle/>
-          <a:p>
-            <a:pPr algn="l"/>
-            <a:r>
-              <a:rPr sz="1600" b="0">
+          <a:p>
+            <a:pPr algn="l">
+              <a:lnSpc>
+                <a:spcPct val="110000"/>
+              </a:lnSpc>
+              <a:spcBef>
+                <a:spcPts val="0"/>
+              </a:spcBef>
+              <a:spcAft>
+                <a:spcPts val="800"/>
+              </a:spcAft>
+            </a:pPr>
+            <a:r>
+              <a:rPr sz="1300">
                 <a:solidFill>
                   <a:srgbClr val="102A43"/>
                 </a:solidFill>
@@ -6735,31 +6363,15 @@
               <a:t>Check that the campaign has the expected dates, status, and accessible collateral or rep routes.</a:t>
             </a:r>
           </a:p>
-        </p:txBody>
-      </p:sp>
-      <p:sp>
-        <p:nvSpPr>
-          <p:cNvPr id="9" name="TextBox 8"/>
-          <p:cNvSpPr txBox="1"/>
-          <p:nvPr/>
-        </p:nvSpPr>
-        <p:spPr>
-          <a:xfrm>
-            <a:off x="749808" y="2011680"/>
-            <a:ext cx="4023360" cy="256032"/>
-          </a:xfrm>
-          <a:prstGeom prst="rect">
-            <a:avLst/>
-          </a:prstGeom>
-          <a:noFill/>
-        </p:spPr>
-        <p:txBody>
-          <a:bodyPr wrap="square" anchor="t">
-            <a:spAutoFit/>
-          </a:bodyPr>
-          <a:lstStyle/>
-          <a:p>
-            <a:pPr algn="l"/>
+          <a:p>
+            <a:pPr algn="l">
+              <a:spcBef>
+                <a:spcPts val="0"/>
+              </a:spcBef>
+              <a:spcAft>
+                <a:spcPts val="200"/>
+              </a:spcAft>
+            </a:pPr>
             <a:r>
               <a:rPr sz="1200" b="1">
                 <a:solidFill>
@@ -6770,33 +6382,20 @@
               <a:t>What appears on screen</a:t>
             </a:r>
           </a:p>
-        </p:txBody>
-      </p:sp>
-      <p:sp>
-        <p:nvSpPr>
-          <p:cNvPr id="10" name="TextBox 9"/>
-          <p:cNvSpPr txBox="1"/>
-          <p:nvPr/>
-        </p:nvSpPr>
-        <p:spPr>
-          <a:xfrm>
-            <a:off x="749808" y="2267712"/>
-            <a:ext cx="3931920" cy="713232"/>
-          </a:xfrm>
-          <a:prstGeom prst="rect">
-            <a:avLst/>
-          </a:prstGeom>
-          <a:noFill/>
-        </p:spPr>
-        <p:txBody>
-          <a:bodyPr wrap="square" anchor="t">
-            <a:spAutoFit/>
-          </a:bodyPr>
-          <a:lstStyle/>
-          <a:p>
-            <a:pPr algn="l"/>
-            <a:r>
-              <a:rPr sz="1600" b="0">
+          <a:p>
+            <a:pPr algn="l">
+              <a:lnSpc>
+                <a:spcPct val="110000"/>
+              </a:lnSpc>
+              <a:spcBef>
+                <a:spcPts val="0"/>
+              </a:spcBef>
+              <a:spcAft>
+                <a:spcPts val="800"/>
+              </a:spcAft>
+            </a:pPr>
+            <a:r>
+              <a:rPr sz="1300">
                 <a:solidFill>
                   <a:srgbClr val="102A43"/>
                 </a:solidFill>
@@ -6805,31 +6404,15 @@
               <a:t>A consistent campaign context across the linked screens.</a:t>
             </a:r>
           </a:p>
-        </p:txBody>
-      </p:sp>
-      <p:sp>
-        <p:nvSpPr>
-          <p:cNvPr id="11" name="TextBox 10"/>
-          <p:cNvSpPr txBox="1"/>
-          <p:nvPr/>
-        </p:nvSpPr>
-        <p:spPr>
-          <a:xfrm>
-            <a:off x="749808" y="3063240"/>
-            <a:ext cx="4023360" cy="256032"/>
-          </a:xfrm>
-          <a:prstGeom prst="rect">
-            <a:avLst/>
-          </a:prstGeom>
-          <a:noFill/>
-        </p:spPr>
-        <p:txBody>
-          <a:bodyPr wrap="square" anchor="t">
-            <a:spAutoFit/>
-          </a:bodyPr>
-          <a:lstStyle/>
-          <a:p>
-            <a:pPr algn="l"/>
+          <a:p>
+            <a:pPr algn="l">
+              <a:spcBef>
+                <a:spcPts val="0"/>
+              </a:spcBef>
+              <a:spcAft>
+                <a:spcPts val="200"/>
+              </a:spcAft>
+            </a:pPr>
             <a:r>
               <a:rPr sz="1200" b="1">
                 <a:solidFill>
@@ -6840,33 +6423,20 @@
               <a:t>Why it matters</a:t>
             </a:r>
           </a:p>
-        </p:txBody>
-      </p:sp>
-      <p:sp>
-        <p:nvSpPr>
-          <p:cNvPr id="12" name="TextBox 11"/>
-          <p:cNvSpPr txBox="1"/>
-          <p:nvPr/>
-        </p:nvSpPr>
-        <p:spPr>
-          <a:xfrm>
-            <a:off x="749808" y="3319272"/>
-            <a:ext cx="3931920" cy="640080"/>
-          </a:xfrm>
-          <a:prstGeom prst="rect">
-            <a:avLst/>
-          </a:prstGeom>
-          <a:noFill/>
-        </p:spPr>
-        <p:txBody>
-          <a:bodyPr wrap="square" anchor="t">
-            <a:spAutoFit/>
-          </a:bodyPr>
-          <a:lstStyle/>
-          <a:p>
-            <a:pPr algn="l"/>
-            <a:r>
-              <a:rPr sz="1500" b="0">
+          <a:p>
+            <a:pPr algn="l">
+              <a:lnSpc>
+                <a:spcPct val="110000"/>
+              </a:lnSpc>
+              <a:spcBef>
+                <a:spcPts val="0"/>
+              </a:spcBef>
+              <a:spcAft>
+                <a:spcPts val="800"/>
+              </a:spcAft>
+            </a:pPr>
+            <a:r>
+              <a:rPr sz="1300">
                 <a:solidFill>
                   <a:srgbClr val="102A43"/>
                 </a:solidFill>
@@ -6875,31 +6445,15 @@
               <a:t>A small mismatch at this stage can ripple into the sharing and doctor experience later.</a:t>
             </a:r>
           </a:p>
-        </p:txBody>
-      </p:sp>
-      <p:sp>
-        <p:nvSpPr>
-          <p:cNvPr id="13" name="TextBox 12"/>
-          <p:cNvSpPr txBox="1"/>
-          <p:nvPr/>
-        </p:nvSpPr>
-        <p:spPr>
-          <a:xfrm>
-            <a:off x="749808" y="4069080"/>
-            <a:ext cx="4023360" cy="256032"/>
-          </a:xfrm>
-          <a:prstGeom prst="rect">
-            <a:avLst/>
-          </a:prstGeom>
-          <a:noFill/>
-        </p:spPr>
-        <p:txBody>
-          <a:bodyPr wrap="square" anchor="t">
-            <a:spAutoFit/>
-          </a:bodyPr>
-          <a:lstStyle/>
-          <a:p>
-            <a:pPr algn="l"/>
+          <a:p>
+            <a:pPr algn="l">
+              <a:spcBef>
+                <a:spcPts val="0"/>
+              </a:spcBef>
+              <a:spcAft>
+                <a:spcPts val="200"/>
+              </a:spcAft>
+            </a:pPr>
             <a:r>
               <a:rPr sz="1200" b="1">
                 <a:solidFill>
@@ -6910,33 +6464,20 @@
               <a:t>Expected result</a:t>
             </a:r>
           </a:p>
-        </p:txBody>
-      </p:sp>
-      <p:sp>
-        <p:nvSpPr>
-          <p:cNvPr id="14" name="TextBox 13"/>
-          <p:cNvSpPr txBox="1"/>
-          <p:nvPr/>
-        </p:nvSpPr>
-        <p:spPr>
-          <a:xfrm>
-            <a:off x="749808" y="4325112"/>
-            <a:ext cx="3931920" cy="566928"/>
-          </a:xfrm>
-          <a:prstGeom prst="rect">
-            <a:avLst/>
-          </a:prstGeom>
-          <a:noFill/>
-        </p:spPr>
-        <p:txBody>
-          <a:bodyPr wrap="square" anchor="t">
-            <a:spAutoFit/>
-          </a:bodyPr>
-          <a:lstStyle/>
-          <a:p>
-            <a:pPr algn="l"/>
-            <a:r>
-              <a:rPr sz="1500" b="0">
+          <a:p>
+            <a:pPr algn="l">
+              <a:lnSpc>
+                <a:spcPct val="110000"/>
+              </a:lnSpc>
+              <a:spcBef>
+                <a:spcPts val="0"/>
+              </a:spcBef>
+              <a:spcAft>
+                <a:spcPts val="800"/>
+              </a:spcAft>
+            </a:pPr>
+            <a:r>
+              <a:rPr sz="1300">
                 <a:solidFill>
                   <a:srgbClr val="102A43"/>
                 </a:solidFill>
@@ -6945,31 +6486,15 @@
               <a:t>The operator knows the campaign is ready for rep and collateral workflows.</a:t>
             </a:r>
           </a:p>
-        </p:txBody>
-      </p:sp>
-      <p:sp>
-        <p:nvSpPr>
-          <p:cNvPr id="15" name="TextBox 14"/>
-          <p:cNvSpPr txBox="1"/>
-          <p:nvPr/>
-        </p:nvSpPr>
-        <p:spPr>
-          <a:xfrm>
-            <a:off x="749808" y="4965192"/>
-            <a:ext cx="4023360" cy="256032"/>
-          </a:xfrm>
-          <a:prstGeom prst="rect">
-            <a:avLst/>
-          </a:prstGeom>
-          <a:noFill/>
-        </p:spPr>
-        <p:txBody>
-          <a:bodyPr wrap="square" anchor="t">
-            <a:spAutoFit/>
-          </a:bodyPr>
-          <a:lstStyle/>
-          <a:p>
-            <a:pPr algn="l"/>
+          <a:p>
+            <a:pPr algn="l">
+              <a:spcBef>
+                <a:spcPts val="0"/>
+              </a:spcBef>
+              <a:spcAft>
+                <a:spcPts val="200"/>
+              </a:spcAft>
+            </a:pPr>
             <a:r>
               <a:rPr sz="1200" b="1">
                 <a:solidFill>
@@ -6980,33 +6505,20 @@
               <a:t>Trainer note</a:t>
             </a:r>
           </a:p>
-        </p:txBody>
-      </p:sp>
-      <p:sp>
-        <p:nvSpPr>
-          <p:cNvPr id="16" name="TextBox 15"/>
-          <p:cNvSpPr txBox="1"/>
-          <p:nvPr/>
-        </p:nvSpPr>
-        <p:spPr>
-          <a:xfrm>
-            <a:off x="749808" y="5212080"/>
-            <a:ext cx="3931920" cy="640080"/>
-          </a:xfrm>
-          <a:prstGeom prst="rect">
-            <a:avLst/>
-          </a:prstGeom>
-          <a:noFill/>
-        </p:spPr>
-        <p:txBody>
-          <a:bodyPr wrap="square" anchor="t">
-            <a:spAutoFit/>
-          </a:bodyPr>
-          <a:lstStyle/>
-          <a:p>
-            <a:pPr algn="l"/>
-            <a:r>
-              <a:rPr sz="1300" b="0">
+          <a:p>
+            <a:pPr algn="l">
+              <a:lnSpc>
+                <a:spcPct val="110000"/>
+              </a:lnSpc>
+              <a:spcBef>
+                <a:spcPts val="0"/>
+              </a:spcBef>
+              <a:spcAft>
+                <a:spcPts val="0"/>
+              </a:spcAft>
+            </a:pPr>
+            <a:r>
+              <a:rPr sz="1200">
                 <a:solidFill>
                   <a:srgbClr val="52667A"/>
                 </a:solidFill>
@@ -7019,7 +6531,7 @@
       </p:sp>
       <p:sp>
         <p:nvSpPr>
-          <p:cNvPr id="17" name="Rounded Rectangle 16"/>
+          <p:cNvPr id="8" name="Rounded Rectangle 7"/>
           <p:cNvSpPr/>
           <p:nvPr/>
         </p:nvSpPr>
@@ -7064,7 +6576,7 @@
       </p:sp>
       <p:sp>
         <p:nvSpPr>
-          <p:cNvPr id="18" name="TextBox 17"/>
+          <p:cNvPr id="9" name="TextBox 8"/>
           <p:cNvSpPr txBox="1"/>
           <p:nvPr/>
         </p:nvSpPr>
@@ -7099,7 +6611,7 @@
       </p:sp>
       <p:pic>
         <p:nvPicPr>
-          <p:cNvPr id="19" name="Picture 18" descr="manage-data-panel.png"/>
+          <p:cNvPr id="10" name="Picture 9" descr="manage-data-panel.png"/>
           <p:cNvPicPr>
             <a:picLocks noChangeAspect="1"/>
           </p:cNvPicPr>
@@ -7123,7 +6635,7 @@
       </p:pic>
       <p:sp>
         <p:nvSpPr>
-          <p:cNvPr id="20" name="TextBox 19"/>
+          <p:cNvPr id="11" name="TextBox 10"/>
           <p:cNvSpPr txBox="1"/>
           <p:nvPr/>
         </p:nvSpPr>
@@ -7158,7 +6670,7 @@
       </p:sp>
       <p:sp>
         <p:nvSpPr>
-          <p:cNvPr id="21" name="TextBox 20"/>
+          <p:cNvPr id="12" name="TextBox 11"/>
           <p:cNvSpPr txBox="1"/>
           <p:nvPr/>
         </p:nvSpPr>
@@ -7569,7 +7081,7 @@
                 </a:solidFill>
                 <a:latin typeface="Aptos"/>
               </a:rPr>
-              <a:t>Validated against the seeded Manage Data Panel on 2026-04-11.</a:t>
+              <a:t>Validated against the seeded Manage Data Panel on 2026-04-23.</a:t>
             </a:r>
           </a:p>
         </p:txBody>
@@ -7863,7 +7375,7 @@
                 </a:solidFill>
                 <a:latin typeface="Aptos"/>
               </a:rPr>
-              <a:t>Validated against the seeded Manage Data Panel on 2026-04-11.</a:t>
+              <a:t>Validated against the seeded Manage Data Panel on 2026-04-23.</a:t>
             </a:r>
           </a:p>
         </p:txBody>
